--- a/docs/webinar/E2E-4/E2E-4-ficha.pptx
+++ b/docs/webinar/E2E-4/E2E-4-ficha.pptx
@@ -108,7 +108,7 @@
   <p:extLst>
     <p:ext uri="{521415D9-36F7-43E2-AB2F-B90AF26B5E84}">
       <p14:sectionLst xmlns:p14="http://schemas.microsoft.com/office/powerpoint/2010/main">
-        <p14:section name="Ficha del taller" id="{b85c0564-4537-b217-e214-03e78baec9c6}">
+        <p14:section name="Ficha del taller" id="{dd04dd03-8730-f5d6-ec96-5e61c8f06af6}">
           <p14:sldIdLst>
             <p14:sldId id="256"/>
             <p14:sldId id="257"/>
@@ -862,7 +862,7 @@
                   <a:srgbClr val="696969"/>
                 </a:solidFill>
               </a:rPr>
-              <a:t>pm-method 2.4.0 · Webinar E2E-4 · Ficha del taller</a:t>
+              <a:t>pm-method 2.5.0 · Webinar E2E-4 · Ficha del taller</a:t>
             </a:r>
             <a:endParaRPr lang="en-US" sz="1000" dirty="0"/>
           </a:p>
@@ -1102,7 +1102,7 @@
                   <a:srgbClr val="696969"/>
                 </a:solidFill>
               </a:rPr>
-              <a:t>pm-method 2.4.0 · Webinar E2E-4 · Ficha del taller</a:t>
+              <a:t>pm-method 2.5.0 · Webinar E2E-4 · Ficha del taller</a:t>
             </a:r>
             <a:endParaRPr lang="en-US" sz="1000" dirty="0"/>
           </a:p>
@@ -1535,7 +1535,7 @@
                 <a:ea typeface="Arial" pitchFamily="34" charset="-122"/>
                 <a:cs typeface="Arial" pitchFamily="34" charset="-120"/>
               </a:rPr>
-              <a:t>Taller · 2 clases de 90 minutos · Webinar pm-method 2.4.0 · E2E-4</a:t>
+              <a:t>Taller · 2 clases de 90 minutos · Webinar pm-method 2.5.0 · E2E-4</a:t>
             </a:r>
             <a:endParaRPr lang="en-US" sz="1400" dirty="0"/>
           </a:p>

--- a/docs/webinar/E2E-4/E2E-4-ficha.pptx
+++ b/docs/webinar/E2E-4/E2E-4-ficha.pptx
@@ -108,7 +108,7 @@
   <p:extLst>
     <p:ext uri="{521415D9-36F7-43E2-AB2F-B90AF26B5E84}">
       <p14:sectionLst xmlns:p14="http://schemas.microsoft.com/office/powerpoint/2010/main">
-        <p14:section name="Ficha del taller" id="{dd04dd03-8730-f5d6-ec96-5e61c8f06af6}">
+        <p14:section name="Ficha del taller" id="{5083595f-cbf0-7ad4-028b-41c8e778f242}">
           <p14:sldIdLst>
             <p14:sldId id="256"/>
             <p14:sldId id="257"/>
@@ -862,7 +862,7 @@
                   <a:srgbClr val="696969"/>
                 </a:solidFill>
               </a:rPr>
-              <a:t>pm-method 2.5.0 · Webinar E2E-4 · Ficha del taller</a:t>
+              <a:t>pm-method 2.5.1 · Webinar E2E-4 · Ficha del taller</a:t>
             </a:r>
             <a:endParaRPr lang="en-US" sz="1000" dirty="0"/>
           </a:p>
@@ -1102,7 +1102,7 @@
                   <a:srgbClr val="696969"/>
                 </a:solidFill>
               </a:rPr>
-              <a:t>pm-method 2.5.0 · Webinar E2E-4 · Ficha del taller</a:t>
+              <a:t>pm-method 2.5.1 · Webinar E2E-4 · Ficha del taller</a:t>
             </a:r>
             <a:endParaRPr lang="en-US" sz="1000" dirty="0"/>
           </a:p>
@@ -1535,7 +1535,7 @@
                 <a:ea typeface="Arial" pitchFamily="34" charset="-122"/>
                 <a:cs typeface="Arial" pitchFamily="34" charset="-120"/>
               </a:rPr>
-              <a:t>Taller · 2 clases de 90 minutos · Webinar pm-method 2.5.0 · E2E-4</a:t>
+              <a:t>Taller · 2 clases de 90 minutos · Webinar pm-method 2.5.1 · E2E-4</a:t>
             </a:r>
             <a:endParaRPr lang="en-US" sz="1400" dirty="0"/>
           </a:p>
@@ -2895,7 +2895,7 @@
                 <a:ea typeface="Arial" pitchFamily="34" charset="-122"/>
                 <a:cs typeface="Arial" pitchFamily="34" charset="-120"/>
               </a:rPr>
-              <a:t>Propone lecciones con cita y arma el expediente con la huella de cada archivo</a:t>
+              <a:t>Propone lecciones con cita y arma el expediente con huellas y bitácora</a:t>
             </a:r>
             <a:endParaRPr lang="en-US" sz="1600" dirty="0"/>
           </a:p>
@@ -3900,7 +3900,7 @@
                 <a:ea typeface="Arial" pitchFamily="34" charset="-122"/>
                 <a:cs typeface="Arial" pitchFamily="34" charset="-120"/>
               </a:rPr>
-              <a:t>Cierre verificado por id y expediente de auditoría</a:t>
+              <a:t>Cierre por id y expediente de auditoría con bitácora</a:t>
             </a:r>
             <a:endParaRPr lang="en-US" sz="1600" dirty="0"/>
           </a:p>
@@ -4273,7 +4273,7 @@
                 <a:ea typeface="Arial" pitchFamily="34" charset="-122"/>
                 <a:cs typeface="Arial" pitchFamily="34" charset="-120"/>
               </a:rPr>
-              <a:t>Evidencia verificable: una palabra cambiada en una copia del expediente se detecta</a:t>
+              <a:t>Evidencia verificable: una edición en una copia se detecta y se explica</a:t>
             </a:r>
             <a:endParaRPr lang="en-US" sz="1600" dirty="0"/>
           </a:p>
